--- a/decks/hist-somme/hist-somme_ch4_trench-life.pptx
+++ b/decks/hist-somme/hist-somme_ch4_trench-life.pptx
@@ -127,31 +127,31 @@
   <p:extLst>
     <p:ext uri="{521415D9-36F7-43E2-AB2F-B90AF26B5E84}">
       <p14:sectionLst xmlns:p14="http://schemas.microsoft.com/office/powerpoint/2010/main">
-        <p14:section name="Opening" id="{cc36f7e1-48b6-06b6-e1f9-94334603fddb}">
+        <p14:section name="Opening" id="{948a682f-e7aa-70c2-138a-20cfc4f09e87}">
           <p14:sldIdLst>
             <p14:sldId id="256"/>
           </p14:sldIdLst>
         </p14:section>
-        <p14:section name="Gate" id="{58092a50-cabf-a425-95b7-893fcc4c942a}">
+        <p14:section name="Gate" id="{56b2a6fe-3063-3e20-0023-b586baded46d}">
           <p14:sldIdLst>
             <p14:sldId id="257"/>
             <p14:sldId id="258"/>
             <p14:sldId id="259"/>
           </p14:sldIdLst>
         </p14:section>
-        <p14:section name="Pre-teach" id="{eb90ecc6-f8fa-5d13-2b5a-12754c16d8ba}">
+        <p14:section name="Pre-teach" id="{5a56206f-caff-4c8c-e4f3-2d29189b4ce2}">
           <p14:sldIdLst>
             <p14:sldId id="260"/>
             <p14:sldId id="261"/>
           </p14:sldIdLst>
         </p14:section>
-        <p14:section name="Read-along" id="{52a5f3ea-c26a-feeb-68ed-93619250e4cc}">
+        <p14:section name="Read-along" id="{f8bd65ea-c4bd-2d4b-fae2-ce2d6ba08015}">
           <p14:sldIdLst>
             <p14:sldId id="262"/>
             <p14:sldId id="263"/>
           </p14:sldIdLst>
         </p14:section>
-        <p14:section name="Teach" id="{63b5a352-e73a-aa3b-de2c-8c59e1a56199}">
+        <p14:section name="Teach" id="{57d296f1-4374-38af-2b00-23166e856a9f}">
           <p14:sldIdLst>
             <p14:sldId id="264"/>
             <p14:sldId id="265"/>
@@ -159,7 +159,7 @@
             <p14:sldId id="267"/>
           </p14:sldIdLst>
         </p14:section>
-        <p14:section name="Routes" id="{df476ed5-9321-1832-7c9a-ef4451cc7b9d}">
+        <p14:section name="Routes" id="{d8c86b3b-8f0e-4978-0800-c0a8668085ec}">
           <p14:sldIdLst>
             <p14:sldId id="268"/>
             <p14:sldId id="269"/>
@@ -167,12 +167,12 @@
             <p14:sldId id="271"/>
           </p14:sldIdLst>
         </p14:section>
-        <p14:section name="Close" id="{a58ac623-05c4-b228-70f1-4aa8b6324644}">
+        <p14:section name="Close" id="{f6b37b36-e51b-772f-0cf6-c8d21ddb1862}">
           <p14:sldIdLst>
             <p14:sldId id="272"/>
           </p14:sldIdLst>
         </p14:section>
-        <p14:section name="Answers" id="{68c1d6af-b6f3-0a98-1ba9-8dc205e0c263}">
+        <p14:section name="Answers" id="{e0c0134c-c7b9-6d55-ce78-aa3516069964}">
           <p14:sldIdLst>
             <p14:sldId id="273"/>
             <p14:sldId id="274"/>
